--- a/index/designs/y7-l11/l3-radicals-pinyin/l3-radicals-pinyin.pptx
+++ b/index/designs/y7-l11/l3-radicals-pinyin/l3-radicals-pinyin.pptx
@@ -11274,9 +11274,6 @@
               </a:rPr>
               <a:t>Write the radical you find </a:t>
             </a:r>
-            <a:pPr algn="l" indent="0" marL="0">
-              <a:buNone/>
-            </a:pPr>
             <a:r>
               <a:rPr lang="en-US" sz="1100" b="1" dirty="0">
                 <a:solidFill>
@@ -11288,9 +11285,6 @@
               </a:rPr>
               <a:t>easiest</a:t>
             </a:r>
-            <a:pPr algn="l" indent="0" marL="0">
-              <a:buNone/>
-            </a:pPr>
             <a:r>
               <a:rPr lang="en-US" sz="1100" dirty="0">
                 <a:solidFill>
@@ -11341,9 +11335,6 @@
               </a:rPr>
               <a:t>Write </a:t>
             </a:r>
-            <a:pPr algn="l" indent="0" marL="0">
-              <a:buNone/>
-            </a:pPr>
             <a:r>
               <a:rPr lang="en-US" sz="1100" b="1" dirty="0">
                 <a:solidFill>
@@ -11355,9 +11346,6 @@
               </a:rPr>
               <a:t>one</a:t>
             </a:r>
-            <a:pPr algn="l" indent="0" marL="0">
-              <a:buNone/>
-            </a:pPr>
             <a:r>
               <a:rPr lang="en-US" sz="1100" dirty="0">
                 <a:solidFill>
@@ -11486,12 +11474,6 @@
               </a:rPr>
               <a:t>Which radical is inside </a:t>
             </a:r>
-            <a:pPr algn="l" indent="0" marL="0">
-              <a:spcBef>
-                <a:spcPts val="400"/>
-              </a:spcBef>
-              <a:buNone/>
-            </a:pPr>
             <a:r>
               <a:rPr lang="en-US" sz="1400" b="1" dirty="0">
                 <a:solidFill>
@@ -11503,12 +11485,6 @@
               </a:rPr>
               <a:t>短</a:t>
             </a:r>
-            <a:pPr algn="l" indent="0" marL="0">
-              <a:spcBef>
-                <a:spcPts val="400"/>
-              </a:spcBef>
-              <a:buNone/>
-            </a:pPr>
             <a:r>
               <a:rPr lang="en-US" sz="1400" dirty="0">
                 <a:solidFill>
@@ -12077,12 +12053,6 @@
               </a:rPr>
               <a:t>Today: </a:t>
             </a:r>
-            <a:pPr algn="ctr" indent="0" marL="0">
-              <a:spcBef>
-                <a:spcPts val="1800"/>
-              </a:spcBef>
-              <a:buNone/>
-            </a:pPr>
             <a:r>
               <a:rPr lang="en-US" sz="1200" b="1" dirty="0">
                 <a:solidFill>
@@ -12094,12 +12064,6 @@
               </a:rPr>
               <a:t>部首 (bùshǒu)</a:t>
             </a:r>
-            <a:pPr algn="ctr" indent="0" marL="0">
-              <a:spcBef>
-                <a:spcPts val="1800"/>
-              </a:spcBef>
-              <a:buNone/>
-            </a:pPr>
             <a:r>
               <a:rPr lang="en-US" sz="1200" dirty="0">
                 <a:solidFill>
@@ -12111,12 +12075,6 @@
               </a:rPr>
               <a:t> = radicals · </a:t>
             </a:r>
-            <a:pPr algn="ctr" indent="0" marL="0">
-              <a:spcBef>
-                <a:spcPts val="1800"/>
-              </a:spcBef>
-              <a:buNone/>
-            </a:pPr>
             <a:r>
               <a:rPr lang="en-US" sz="1200" b="1" dirty="0">
                 <a:solidFill>
@@ -12128,12 +12086,6 @@
               </a:rPr>
               <a:t>an/en/in/un/ün</a:t>
             </a:r>
-            <a:pPr algn="ctr" indent="0" marL="0">
-              <a:spcBef>
-                <a:spcPts val="1800"/>
-              </a:spcBef>
-              <a:buNone/>
-            </a:pPr>
             <a:r>
               <a:rPr lang="en-US" sz="1200" dirty="0">
                 <a:solidFill>
@@ -13838,12 +13790,6 @@
               </a:rPr>
               <a:t>We are learning to recognise </a:t>
             </a:r>
-            <a:pPr algn="l" indent="0" marL="0">
-              <a:spcBef>
-                <a:spcPts val="400"/>
-              </a:spcBef>
-              <a:buNone/>
-            </a:pPr>
             <a:r>
               <a:rPr lang="en-US" sz="1400" b="1" dirty="0">
                 <a:solidFill>
@@ -13855,12 +13801,6 @@
               </a:rPr>
               <a:t>6 new radicals</a:t>
             </a:r>
-            <a:pPr algn="l" indent="0" marL="0">
-              <a:spcBef>
-                <a:spcPts val="400"/>
-              </a:spcBef>
-              <a:buNone/>
-            </a:pPr>
             <a:r>
               <a:rPr lang="en-US" sz="1400" dirty="0">
                 <a:solidFill>
@@ -13872,12 +13812,6 @@
               </a:rPr>
               <a:t> and to hear the difference between </a:t>
             </a:r>
-            <a:pPr algn="l" indent="0" marL="0">
-              <a:spcBef>
-                <a:spcPts val="400"/>
-              </a:spcBef>
-              <a:buNone/>
-            </a:pPr>
             <a:r>
               <a:rPr lang="en-US" sz="1400" b="1" dirty="0">
                 <a:solidFill>
@@ -13889,12 +13823,6 @@
               </a:rPr>
               <a:t>an / en / in / un / ün</a:t>
             </a:r>
-            <a:pPr algn="l" indent="0" marL="0">
-              <a:spcBef>
-                <a:spcPts val="400"/>
-              </a:spcBef>
-              <a:buNone/>
-            </a:pPr>
             <a:r>
               <a:rPr lang="en-US" sz="1400" dirty="0">
                 <a:solidFill>
@@ -14016,9 +13944,6 @@
               </a:rPr>
               <a:t>I can name the </a:t>
             </a:r>
-            <a:pPr algn="l" indent="0" marL="0">
-              <a:buNone/>
-            </a:pPr>
             <a:r>
               <a:rPr lang="en-US" sz="1200" b="1" dirty="0">
                 <a:solidFill>
@@ -14030,9 +13955,6 @@
               </a:rPr>
               <a:t>6 new radicals</a:t>
             </a:r>
-            <a:pPr algn="l" indent="0" marL="0">
-              <a:buNone/>
-            </a:pPr>
             <a:r>
               <a:rPr lang="en-US" sz="1200" dirty="0">
                 <a:solidFill>
@@ -14196,9 +14118,6 @@
               </a:rPr>
               <a:t>I can spot a radical inside an </a:t>
             </a:r>
-            <a:pPr algn="l" indent="0" marL="0">
-              <a:buNone/>
-            </a:pPr>
             <a:r>
               <a:rPr lang="en-US" sz="1200" b="1" dirty="0">
                 <a:solidFill>
@@ -14210,9 +14129,6 @@
               </a:rPr>
               <a:t>unfamiliar character</a:t>
             </a:r>
-            <a:pPr algn="l" indent="0" marL="0">
-              <a:buNone/>
-            </a:pPr>
             <a:r>
               <a:rPr lang="en-US" sz="1200" dirty="0">
                 <a:solidFill>
@@ -14376,9 +14292,6 @@
               </a:rPr>
               <a:t>I can add the correct </a:t>
             </a:r>
-            <a:pPr algn="l" indent="0" marL="0">
-              <a:buNone/>
-            </a:pPr>
             <a:r>
               <a:rPr lang="en-US" sz="1200" b="1" dirty="0">
                 <a:solidFill>
@@ -14390,9 +14303,6 @@
               </a:rPr>
               <a:t>tonal mark</a:t>
             </a:r>
-            <a:pPr algn="l" indent="0" marL="0">
-              <a:buNone/>
-            </a:pPr>
             <a:r>
               <a:rPr lang="en-US" sz="1200" dirty="0">
                 <a:solidFill>
@@ -14768,10 +14678,68 @@
               </a:rPr>
               <a:t>穴</a:t>
             </a:r>
+            <a:r>
+              <a:rPr lang="en-US" sz="1300" dirty="0">
+                <a:solidFill>
+                  <a:srgbClr val="1E2A38"/>
+                </a:solidFill>
+                <a:latin typeface="Noto Sans SC" pitchFamily="34" charset="0"/>
+                <a:ea typeface="Noto Sans SC" pitchFamily="34" charset="-122"/>
+                <a:cs typeface="Noto Sans SC" pitchFamily="34" charset="-120"/>
+              </a:rPr>
+              <a:t> xué · cave </a:t>
+            </a:r>
+            <a:r>
+              <a:rPr lang="en-US" sz="1300" dirty="0">
+                <a:solidFill>
+                  <a:srgbClr val="8B94A3"/>
+                </a:solidFill>
+                <a:latin typeface="Noto Sans SC" pitchFamily="34" charset="0"/>
+                <a:ea typeface="Noto Sans SC" pitchFamily="34" charset="-122"/>
+                <a:cs typeface="Noto Sans SC" pitchFamily="34" charset="-120"/>
+              </a:rPr>
+              <a:t>— e.g.</a:t>
+            </a:r>
+            <a:r>
+              <a:rPr lang="en-US" sz="1300" b="1" dirty="0">
+                <a:solidFill>
+                  <a:srgbClr val="1E2A38"/>
+                </a:solidFill>
+                <a:latin typeface="Noto Sans SC" pitchFamily="34" charset="0"/>
+                <a:ea typeface="Noto Sans SC" pitchFamily="34" charset="-122"/>
+                <a:cs typeface="Noto Sans SC" pitchFamily="34" charset="-120"/>
+              </a:rPr>
+              <a:t>穿</a:t>
+            </a:r>
+            <a:r>
+              <a:rPr lang="en-US" sz="1300" dirty="0">
+                <a:solidFill>
+                  <a:srgbClr val="8B94A3"/>
+                </a:solidFill>
+                <a:latin typeface="Noto Sans SC" pitchFamily="34" charset="0"/>
+                <a:ea typeface="Noto Sans SC" pitchFamily="34" charset="-122"/>
+                <a:cs typeface="Noto Sans SC" pitchFamily="34" charset="-120"/>
+              </a:rPr>
+              <a:t> chuān, "to wear, put on"</a:t>
+            </a:r>
+            <a:endParaRPr lang="en-US" sz="1300" dirty="0"/>
+          </a:p>
+          <a:p>
             <a:pPr algn="l" indent="0" marL="0">
               <a:buNone/>
             </a:pPr>
             <a:r>
+              <a:rPr lang="en-US" sz="1700" b="1" dirty="0">
+                <a:solidFill>
+                  <a:srgbClr val="3A7D8C"/>
+                </a:solidFill>
+                <a:latin typeface="Noto Sans SC" pitchFamily="34" charset="0"/>
+                <a:ea typeface="Noto Sans SC" pitchFamily="34" charset="-122"/>
+                <a:cs typeface="Noto Sans SC" pitchFamily="34" charset="-120"/>
+              </a:rPr>
+              <a:t>矢</a:t>
+            </a:r>
+            <a:r>
               <a:rPr lang="en-US" sz="1300" dirty="0">
                 <a:solidFill>
                   <a:srgbClr val="1E2A38"/>
@@ -14780,14 +14748,72 @@
                 <a:ea typeface="Noto Sans SC" pitchFamily="34" charset="-122"/>
                 <a:cs typeface="Noto Sans SC" pitchFamily="34" charset="-120"/>
               </a:rPr>
-              <a:t> xué · cave </a:t>
-            </a:r>
+              <a:t> shǐ · arrow </a:t>
+            </a:r>
+            <a:r>
+              <a:rPr lang="en-US" sz="1300" dirty="0">
+                <a:solidFill>
+                  <a:srgbClr val="8B94A3"/>
+                </a:solidFill>
+                <a:latin typeface="Noto Sans SC" pitchFamily="34" charset="0"/>
+                <a:ea typeface="Noto Sans SC" pitchFamily="34" charset="-122"/>
+                <a:cs typeface="Noto Sans SC" pitchFamily="34" charset="-120"/>
+              </a:rPr>
+              <a:t>— e.g.</a:t>
+            </a:r>
+            <a:r>
+              <a:rPr lang="en-US" sz="1300" b="1" dirty="0">
+                <a:solidFill>
+                  <a:srgbClr val="1E2A38"/>
+                </a:solidFill>
+                <a:latin typeface="Noto Sans SC" pitchFamily="34" charset="0"/>
+                <a:ea typeface="Noto Sans SC" pitchFamily="34" charset="-122"/>
+                <a:cs typeface="Noto Sans SC" pitchFamily="34" charset="-120"/>
+              </a:rPr>
+              <a:t>短</a:t>
+            </a:r>
+            <a:r>
+              <a:rPr lang="en-US" sz="1300" dirty="0">
+                <a:solidFill>
+                  <a:srgbClr val="8B94A3"/>
+                </a:solidFill>
+                <a:latin typeface="Noto Sans SC" pitchFamily="34" charset="0"/>
+                <a:ea typeface="Noto Sans SC" pitchFamily="34" charset="-122"/>
+                <a:cs typeface="Noto Sans SC" pitchFamily="34" charset="-120"/>
+              </a:rPr>
+              <a:t> duǎn, "short"</a:t>
+            </a:r>
+            <a:endParaRPr lang="en-US" sz="1300" dirty="0"/>
+          </a:p>
+          <a:p>
             <a:pPr algn="l" indent="0" marL="0">
               <a:buNone/>
             </a:pPr>
             <a:r>
+              <a:rPr lang="en-US" sz="1700" b="1" dirty="0">
+                <a:solidFill>
+                  <a:srgbClr val="3A7D8C"/>
+                </a:solidFill>
+                <a:latin typeface="Noto Sans SC" pitchFamily="34" charset="0"/>
+                <a:ea typeface="Noto Sans SC" pitchFamily="34" charset="-122"/>
+                <a:cs typeface="Noto Sans SC" pitchFamily="34" charset="-120"/>
+              </a:rPr>
+              <a:t>页</a:t>
+            </a:r>
+            <a:r>
               <a:rPr lang="en-US" sz="1300" dirty="0">
                 <a:solidFill>
+                  <a:srgbClr val="1E2A38"/>
+                </a:solidFill>
+                <a:latin typeface="Noto Sans SC" pitchFamily="34" charset="0"/>
+                <a:ea typeface="Noto Sans SC" pitchFamily="34" charset="-122"/>
+                <a:cs typeface="Noto Sans SC" pitchFamily="34" charset="-120"/>
+              </a:rPr>
+              <a:t> yè · page </a:t>
+            </a:r>
+            <a:r>
+              <a:rPr lang="en-US" sz="1300" dirty="0">
+                <a:solidFill>
                   <a:srgbClr val="8B94A3"/>
                 </a:solidFill>
                 <a:latin typeface="Noto Sans SC" pitchFamily="34" charset="0"/>
@@ -14796,10 +14822,68 @@
               </a:rPr>
               <a:t>— e.g.</a:t>
             </a:r>
+            <a:r>
+              <a:rPr lang="en-US" sz="1300" b="1" dirty="0">
+                <a:solidFill>
+                  <a:srgbClr val="1E2A38"/>
+                </a:solidFill>
+                <a:latin typeface="Noto Sans SC" pitchFamily="34" charset="0"/>
+                <a:ea typeface="Noto Sans SC" pitchFamily="34" charset="-122"/>
+                <a:cs typeface="Noto Sans SC" pitchFamily="34" charset="-120"/>
+              </a:rPr>
+              <a:t>颜</a:t>
+            </a:r>
+            <a:r>
+              <a:rPr lang="en-US" sz="1300" dirty="0">
+                <a:solidFill>
+                  <a:srgbClr val="8B94A3"/>
+                </a:solidFill>
+                <a:latin typeface="Noto Sans SC" pitchFamily="34" charset="0"/>
+                <a:ea typeface="Noto Sans SC" pitchFamily="34" charset="-122"/>
+                <a:cs typeface="Noto Sans SC" pitchFamily="34" charset="-120"/>
+              </a:rPr>
+              <a:t> yán, "face, colour (颜色)"</a:t>
+            </a:r>
+            <a:endParaRPr lang="en-US" sz="1300" dirty="0"/>
+          </a:p>
+          <a:p>
             <a:pPr algn="l" indent="0" marL="0">
               <a:buNone/>
             </a:pPr>
             <a:r>
+              <a:rPr lang="en-US" sz="1700" b="1" dirty="0">
+                <a:solidFill>
+                  <a:srgbClr val="3A7D8C"/>
+                </a:solidFill>
+                <a:latin typeface="Noto Sans SC" pitchFamily="34" charset="0"/>
+                <a:ea typeface="Noto Sans SC" pitchFamily="34" charset="-122"/>
+                <a:cs typeface="Noto Sans SC" pitchFamily="34" charset="-120"/>
+              </a:rPr>
+              <a:t>扌(才)</a:t>
+            </a:r>
+            <a:r>
+              <a:rPr lang="en-US" sz="1300" dirty="0">
+                <a:solidFill>
+                  <a:srgbClr val="1E2A38"/>
+                </a:solidFill>
+                <a:latin typeface="Noto Sans SC" pitchFamily="34" charset="0"/>
+                <a:ea typeface="Noto Sans SC" pitchFamily="34" charset="-122"/>
+                <a:cs typeface="Noto Sans SC" pitchFamily="34" charset="-120"/>
+              </a:rPr>
+              <a:t> shǒu · hand </a:t>
+            </a:r>
+            <a:r>
+              <a:rPr lang="en-US" sz="1300" dirty="0">
+                <a:solidFill>
+                  <a:srgbClr val="8B94A3"/>
+                </a:solidFill>
+                <a:latin typeface="Noto Sans SC" pitchFamily="34" charset="0"/>
+                <a:ea typeface="Noto Sans SC" pitchFamily="34" charset="-122"/>
+                <a:cs typeface="Noto Sans SC" pitchFamily="34" charset="-120"/>
+              </a:rPr>
+              <a:t>— e.g.</a:t>
+            </a:r>
+            <a:r>
               <a:rPr lang="en-US" sz="1300" b="1" dirty="0">
                 <a:solidFill>
                   <a:srgbClr val="1E2A38"/>
@@ -14808,21 +14892,79 @@
                 <a:ea typeface="Noto Sans SC" pitchFamily="34" charset="-122"/>
                 <a:cs typeface="Noto Sans SC" pitchFamily="34" charset="-120"/>
               </a:rPr>
-              <a:t>穿</a:t>
-            </a:r>
+              <a:t>拉</a:t>
+            </a:r>
+            <a:r>
+              <a:rPr lang="en-US" sz="1300" dirty="0">
+                <a:solidFill>
+                  <a:srgbClr val="8B94A3"/>
+                </a:solidFill>
+                <a:latin typeface="Noto Sans SC" pitchFamily="34" charset="0"/>
+                <a:ea typeface="Noto Sans SC" pitchFamily="34" charset="-122"/>
+                <a:cs typeface="Noto Sans SC" pitchFamily="34" charset="-120"/>
+              </a:rPr>
+              <a:t> lā, "to pull"</a:t>
+            </a:r>
+            <a:endParaRPr lang="en-US" sz="1300" dirty="0"/>
+          </a:p>
+          <a:p>
             <a:pPr algn="l" indent="0" marL="0">
               <a:buNone/>
             </a:pPr>
             <a:r>
+              <a:rPr lang="en-US" sz="1700" b="1" dirty="0">
+                <a:solidFill>
+                  <a:srgbClr val="3A7D8C"/>
+                </a:solidFill>
+                <a:latin typeface="Noto Sans SC" pitchFamily="34" charset="0"/>
+                <a:ea typeface="Noto Sans SC" pitchFamily="34" charset="-122"/>
+                <a:cs typeface="Noto Sans SC" pitchFamily="34" charset="-120"/>
+              </a:rPr>
+              <a:t>艹</a:t>
+            </a:r>
+            <a:r>
               <a:rPr lang="en-US" sz="1300" dirty="0">
                 <a:solidFill>
+                  <a:srgbClr val="1E2A38"/>
+                </a:solidFill>
+                <a:latin typeface="Noto Sans SC" pitchFamily="34" charset="0"/>
+                <a:ea typeface="Noto Sans SC" pitchFamily="34" charset="-122"/>
+                <a:cs typeface="Noto Sans SC" pitchFamily="34" charset="-120"/>
+              </a:rPr>
+              <a:t> cǎo · grass </a:t>
+            </a:r>
+            <a:r>
+              <a:rPr lang="en-US" sz="1300" dirty="0">
+                <a:solidFill>
                   <a:srgbClr val="8B94A3"/>
                 </a:solidFill>
                 <a:latin typeface="Noto Sans SC" pitchFamily="34" charset="0"/>
                 <a:ea typeface="Noto Sans SC" pitchFamily="34" charset="-122"/>
                 <a:cs typeface="Noto Sans SC" pitchFamily="34" charset="-120"/>
               </a:rPr>
-              <a:t> chuān, "to wear, put on"</a:t>
+              <a:t>— e.g.</a:t>
+            </a:r>
+            <a:r>
+              <a:rPr lang="en-US" sz="1300" b="1" dirty="0">
+                <a:solidFill>
+                  <a:srgbClr val="1E2A38"/>
+                </a:solidFill>
+                <a:latin typeface="Noto Sans SC" pitchFamily="34" charset="0"/>
+                <a:ea typeface="Noto Sans SC" pitchFamily="34" charset="-122"/>
+                <a:cs typeface="Noto Sans SC" pitchFamily="34" charset="-120"/>
+              </a:rPr>
+              <a:t>英</a:t>
+            </a:r>
+            <a:r>
+              <a:rPr lang="en-US" sz="1300" dirty="0">
+                <a:solidFill>
+                  <a:srgbClr val="8B94A3"/>
+                </a:solidFill>
+                <a:latin typeface="Noto Sans SC" pitchFamily="34" charset="0"/>
+                <a:ea typeface="Noto Sans SC" pitchFamily="34" charset="-122"/>
+                <a:cs typeface="Noto Sans SC" pitchFamily="34" charset="-120"/>
+              </a:rPr>
+              <a:t> yīng, "as in 英语, 英国"</a:t>
             </a:r>
             <a:endParaRPr lang="en-US" sz="1300" dirty="0"/>
           </a:p>
@@ -14833,17 +14975,14 @@
             <a:r>
               <a:rPr lang="en-US" sz="1700" b="1" dirty="0">
                 <a:solidFill>
-                  <a:srgbClr val="3A7D8C"/>
-                </a:solidFill>
-                <a:latin typeface="Noto Sans SC" pitchFamily="34" charset="0"/>
-                <a:ea typeface="Noto Sans SC" pitchFamily="34" charset="-122"/>
-                <a:cs typeface="Noto Sans SC" pitchFamily="34" charset="-120"/>
-              </a:rPr>
-              <a:t>矢</a:t>
-            </a:r>
-            <a:pPr algn="l" indent="0" marL="0">
-              <a:buNone/>
-            </a:pPr>
+                  <a:srgbClr val="C8943E"/>
+                </a:solidFill>
+                <a:latin typeface="Noto Sans SC" pitchFamily="34" charset="0"/>
+                <a:ea typeface="Noto Sans SC" pitchFamily="34" charset="-122"/>
+                <a:cs typeface="Noto Sans SC" pitchFamily="34" charset="-120"/>
+              </a:rPr>
+              <a:t>走</a:t>
+            </a:r>
             <a:r>
               <a:rPr lang="en-US" sz="1300" dirty="0">
                 <a:solidFill>
@@ -14853,11 +14992,8 @@
                 <a:ea typeface="Noto Sans SC" pitchFamily="34" charset="-122"/>
                 <a:cs typeface="Noto Sans SC" pitchFamily="34" charset="-120"/>
               </a:rPr>
-              <a:t> shǐ · arrow </a:t>
-            </a:r>
-            <a:pPr algn="l" indent="0" marL="0">
-              <a:buNone/>
-            </a:pPr>
+              <a:t> zǒu · walk </a:t>
+            </a:r>
             <a:r>
               <a:rPr lang="en-US" sz="1300" dirty="0">
                 <a:solidFill>
@@ -14869,9 +15005,6 @@
               </a:rPr>
               <a:t>— e.g.</a:t>
             </a:r>
-            <a:pPr algn="l" indent="0" marL="0">
-              <a:buNone/>
-            </a:pPr>
             <a:r>
               <a:rPr lang="en-US" sz="1300" b="1" dirty="0">
                 <a:solidFill>
@@ -14881,11 +15014,8 @@
                 <a:ea typeface="Noto Sans SC" pitchFamily="34" charset="-122"/>
                 <a:cs typeface="Noto Sans SC" pitchFamily="34" charset="-120"/>
               </a:rPr>
-              <a:t>短</a:t>
-            </a:r>
-            <a:pPr algn="l" indent="0" marL="0">
-              <a:buNone/>
-            </a:pPr>
+              <a:t>起</a:t>
+            </a:r>
             <a:r>
               <a:rPr lang="en-US" sz="1300" dirty="0">
                 <a:solidFill>
@@ -14895,303 +15025,8 @@
                 <a:ea typeface="Noto Sans SC" pitchFamily="34" charset="-122"/>
                 <a:cs typeface="Noto Sans SC" pitchFamily="34" charset="-120"/>
               </a:rPr>
-              <a:t> duǎn, "short"</a:t>
-            </a:r>
-            <a:endParaRPr lang="en-US" sz="1300" dirty="0"/>
-          </a:p>
-          <a:p>
-            <a:pPr algn="l" indent="0" marL="0">
-              <a:buNone/>
-            </a:pPr>
-            <a:r>
-              <a:rPr lang="en-US" sz="1700" b="1" dirty="0">
-                <a:solidFill>
-                  <a:srgbClr val="3A7D8C"/>
-                </a:solidFill>
-                <a:latin typeface="Noto Sans SC" pitchFamily="34" charset="0"/>
-                <a:ea typeface="Noto Sans SC" pitchFamily="34" charset="-122"/>
-                <a:cs typeface="Noto Sans SC" pitchFamily="34" charset="-120"/>
-              </a:rPr>
-              <a:t>页</a:t>
-            </a:r>
-            <a:pPr algn="l" indent="0" marL="0">
-              <a:buNone/>
-            </a:pPr>
-            <a:r>
-              <a:rPr lang="en-US" sz="1300" dirty="0">
-                <a:solidFill>
-                  <a:srgbClr val="1E2A38"/>
-                </a:solidFill>
-                <a:latin typeface="Noto Sans SC" pitchFamily="34" charset="0"/>
-                <a:ea typeface="Noto Sans SC" pitchFamily="34" charset="-122"/>
-                <a:cs typeface="Noto Sans SC" pitchFamily="34" charset="-120"/>
-              </a:rPr>
-              <a:t> yè · page </a:t>
-            </a:r>
-            <a:pPr algn="l" indent="0" marL="0">
-              <a:buNone/>
-            </a:pPr>
-            <a:r>
-              <a:rPr lang="en-US" sz="1300" dirty="0">
-                <a:solidFill>
-                  <a:srgbClr val="8B94A3"/>
-                </a:solidFill>
-                <a:latin typeface="Noto Sans SC" pitchFamily="34" charset="0"/>
-                <a:ea typeface="Noto Sans SC" pitchFamily="34" charset="-122"/>
-                <a:cs typeface="Noto Sans SC" pitchFamily="34" charset="-120"/>
-              </a:rPr>
-              <a:t>— e.g.</a:t>
-            </a:r>
-            <a:pPr algn="l" indent="0" marL="0">
-              <a:buNone/>
-            </a:pPr>
-            <a:r>
-              <a:rPr lang="en-US" sz="1300" b="1" dirty="0">
-                <a:solidFill>
-                  <a:srgbClr val="1E2A38"/>
-                </a:solidFill>
-                <a:latin typeface="Noto Sans SC" pitchFamily="34" charset="0"/>
-                <a:ea typeface="Noto Sans SC" pitchFamily="34" charset="-122"/>
-                <a:cs typeface="Noto Sans SC" pitchFamily="34" charset="-120"/>
-              </a:rPr>
-              <a:t>颜</a:t>
-            </a:r>
-            <a:pPr algn="l" indent="0" marL="0">
-              <a:buNone/>
-            </a:pPr>
-            <a:r>
-              <a:rPr lang="en-US" sz="1300" dirty="0">
-                <a:solidFill>
-                  <a:srgbClr val="8B94A3"/>
-                </a:solidFill>
-                <a:latin typeface="Noto Sans SC" pitchFamily="34" charset="0"/>
-                <a:ea typeface="Noto Sans SC" pitchFamily="34" charset="-122"/>
-                <a:cs typeface="Noto Sans SC" pitchFamily="34" charset="-120"/>
-              </a:rPr>
-              <a:t> yán, "face, colour (颜色)"</a:t>
-            </a:r>
-            <a:endParaRPr lang="en-US" sz="1300" dirty="0"/>
-          </a:p>
-          <a:p>
-            <a:pPr algn="l" indent="0" marL="0">
-              <a:buNone/>
-            </a:pPr>
-            <a:r>
-              <a:rPr lang="en-US" sz="1700" b="1" dirty="0">
-                <a:solidFill>
-                  <a:srgbClr val="3A7D8C"/>
-                </a:solidFill>
-                <a:latin typeface="Noto Sans SC" pitchFamily="34" charset="0"/>
-                <a:ea typeface="Noto Sans SC" pitchFamily="34" charset="-122"/>
-                <a:cs typeface="Noto Sans SC" pitchFamily="34" charset="-120"/>
-              </a:rPr>
-              <a:t>扌(才)</a:t>
-            </a:r>
-            <a:pPr algn="l" indent="0" marL="0">
-              <a:buNone/>
-            </a:pPr>
-            <a:r>
-              <a:rPr lang="en-US" sz="1300" dirty="0">
-                <a:solidFill>
-                  <a:srgbClr val="1E2A38"/>
-                </a:solidFill>
-                <a:latin typeface="Noto Sans SC" pitchFamily="34" charset="0"/>
-                <a:ea typeface="Noto Sans SC" pitchFamily="34" charset="-122"/>
-                <a:cs typeface="Noto Sans SC" pitchFamily="34" charset="-120"/>
-              </a:rPr>
-              <a:t> shǒu · hand </a:t>
-            </a:r>
-            <a:pPr algn="l" indent="0" marL="0">
-              <a:buNone/>
-            </a:pPr>
-            <a:r>
-              <a:rPr lang="en-US" sz="1300" dirty="0">
-                <a:solidFill>
-                  <a:srgbClr val="8B94A3"/>
-                </a:solidFill>
-                <a:latin typeface="Noto Sans SC" pitchFamily="34" charset="0"/>
-                <a:ea typeface="Noto Sans SC" pitchFamily="34" charset="-122"/>
-                <a:cs typeface="Noto Sans SC" pitchFamily="34" charset="-120"/>
-              </a:rPr>
-              <a:t>— e.g.</a:t>
-            </a:r>
-            <a:pPr algn="l" indent="0" marL="0">
-              <a:buNone/>
-            </a:pPr>
-            <a:r>
-              <a:rPr lang="en-US" sz="1300" b="1" dirty="0">
-                <a:solidFill>
-                  <a:srgbClr val="1E2A38"/>
-                </a:solidFill>
-                <a:latin typeface="Noto Sans SC" pitchFamily="34" charset="0"/>
-                <a:ea typeface="Noto Sans SC" pitchFamily="34" charset="-122"/>
-                <a:cs typeface="Noto Sans SC" pitchFamily="34" charset="-120"/>
-              </a:rPr>
-              <a:t>拉</a:t>
-            </a:r>
-            <a:pPr algn="l" indent="0" marL="0">
-              <a:buNone/>
-            </a:pPr>
-            <a:r>
-              <a:rPr lang="en-US" sz="1300" dirty="0">
-                <a:solidFill>
-                  <a:srgbClr val="8B94A3"/>
-                </a:solidFill>
-                <a:latin typeface="Noto Sans SC" pitchFamily="34" charset="0"/>
-                <a:ea typeface="Noto Sans SC" pitchFamily="34" charset="-122"/>
-                <a:cs typeface="Noto Sans SC" pitchFamily="34" charset="-120"/>
-              </a:rPr>
-              <a:t> lā, "to pull"</a:t>
-            </a:r>
-            <a:endParaRPr lang="en-US" sz="1300" dirty="0"/>
-          </a:p>
-          <a:p>
-            <a:pPr algn="l" indent="0" marL="0">
-              <a:buNone/>
-            </a:pPr>
-            <a:r>
-              <a:rPr lang="en-US" sz="1700" b="1" dirty="0">
-                <a:solidFill>
-                  <a:srgbClr val="3A7D8C"/>
-                </a:solidFill>
-                <a:latin typeface="Noto Sans SC" pitchFamily="34" charset="0"/>
-                <a:ea typeface="Noto Sans SC" pitchFamily="34" charset="-122"/>
-                <a:cs typeface="Noto Sans SC" pitchFamily="34" charset="-120"/>
-              </a:rPr>
-              <a:t>艹</a:t>
-            </a:r>
-            <a:pPr algn="l" indent="0" marL="0">
-              <a:buNone/>
-            </a:pPr>
-            <a:r>
-              <a:rPr lang="en-US" sz="1300" dirty="0">
-                <a:solidFill>
-                  <a:srgbClr val="1E2A38"/>
-                </a:solidFill>
-                <a:latin typeface="Noto Sans SC" pitchFamily="34" charset="0"/>
-                <a:ea typeface="Noto Sans SC" pitchFamily="34" charset="-122"/>
-                <a:cs typeface="Noto Sans SC" pitchFamily="34" charset="-120"/>
-              </a:rPr>
-              <a:t> cǎo · grass </a:t>
-            </a:r>
-            <a:pPr algn="l" indent="0" marL="0">
-              <a:buNone/>
-            </a:pPr>
-            <a:r>
-              <a:rPr lang="en-US" sz="1300" dirty="0">
-                <a:solidFill>
-                  <a:srgbClr val="8B94A3"/>
-                </a:solidFill>
-                <a:latin typeface="Noto Sans SC" pitchFamily="34" charset="0"/>
-                <a:ea typeface="Noto Sans SC" pitchFamily="34" charset="-122"/>
-                <a:cs typeface="Noto Sans SC" pitchFamily="34" charset="-120"/>
-              </a:rPr>
-              <a:t>— e.g.</a:t>
-            </a:r>
-            <a:pPr algn="l" indent="0" marL="0">
-              <a:buNone/>
-            </a:pPr>
-            <a:r>
-              <a:rPr lang="en-US" sz="1300" b="1" dirty="0">
-                <a:solidFill>
-                  <a:srgbClr val="1E2A38"/>
-                </a:solidFill>
-                <a:latin typeface="Noto Sans SC" pitchFamily="34" charset="0"/>
-                <a:ea typeface="Noto Sans SC" pitchFamily="34" charset="-122"/>
-                <a:cs typeface="Noto Sans SC" pitchFamily="34" charset="-120"/>
-              </a:rPr>
-              <a:t>英</a:t>
-            </a:r>
-            <a:pPr algn="l" indent="0" marL="0">
-              <a:buNone/>
-            </a:pPr>
-            <a:r>
-              <a:rPr lang="en-US" sz="1300" dirty="0">
-                <a:solidFill>
-                  <a:srgbClr val="8B94A3"/>
-                </a:solidFill>
-                <a:latin typeface="Noto Sans SC" pitchFamily="34" charset="0"/>
-                <a:ea typeface="Noto Sans SC" pitchFamily="34" charset="-122"/>
-                <a:cs typeface="Noto Sans SC" pitchFamily="34" charset="-120"/>
-              </a:rPr>
-              <a:t> yīng, "as in 英语, 英国"</a:t>
-            </a:r>
-            <a:endParaRPr lang="en-US" sz="1300" dirty="0"/>
-          </a:p>
-          <a:p>
-            <a:pPr algn="l" indent="0" marL="0">
-              <a:buNone/>
-            </a:pPr>
-            <a:r>
-              <a:rPr lang="en-US" sz="1700" b="1" dirty="0">
-                <a:solidFill>
-                  <a:srgbClr val="C8943E"/>
-                </a:solidFill>
-                <a:latin typeface="Noto Sans SC" pitchFamily="34" charset="0"/>
-                <a:ea typeface="Noto Sans SC" pitchFamily="34" charset="-122"/>
-                <a:cs typeface="Noto Sans SC" pitchFamily="34" charset="-120"/>
-              </a:rPr>
-              <a:t>走</a:t>
-            </a:r>
-            <a:pPr algn="l" indent="0" marL="0">
-              <a:buNone/>
-            </a:pPr>
-            <a:r>
-              <a:rPr lang="en-US" sz="1300" dirty="0">
-                <a:solidFill>
-                  <a:srgbClr val="1E2A38"/>
-                </a:solidFill>
-                <a:latin typeface="Noto Sans SC" pitchFamily="34" charset="0"/>
-                <a:ea typeface="Noto Sans SC" pitchFamily="34" charset="-122"/>
-                <a:cs typeface="Noto Sans SC" pitchFamily="34" charset="-120"/>
-              </a:rPr>
-              <a:t> zǒu · walk </a:t>
-            </a:r>
-            <a:pPr algn="l" indent="0" marL="0">
-              <a:buNone/>
-            </a:pPr>
-            <a:r>
-              <a:rPr lang="en-US" sz="1300" dirty="0">
-                <a:solidFill>
-                  <a:srgbClr val="8B94A3"/>
-                </a:solidFill>
-                <a:latin typeface="Noto Sans SC" pitchFamily="34" charset="0"/>
-                <a:ea typeface="Noto Sans SC" pitchFamily="34" charset="-122"/>
-                <a:cs typeface="Noto Sans SC" pitchFamily="34" charset="-120"/>
-              </a:rPr>
-              <a:t>— e.g.</a:t>
-            </a:r>
-            <a:pPr algn="l" indent="0" marL="0">
-              <a:buNone/>
-            </a:pPr>
-            <a:r>
-              <a:rPr lang="en-US" sz="1300" b="1" dirty="0">
-                <a:solidFill>
-                  <a:srgbClr val="1E2A38"/>
-                </a:solidFill>
-                <a:latin typeface="Noto Sans SC" pitchFamily="34" charset="0"/>
-                <a:ea typeface="Noto Sans SC" pitchFamily="34" charset="-122"/>
-                <a:cs typeface="Noto Sans SC" pitchFamily="34" charset="-120"/>
-              </a:rPr>
-              <a:t>起</a:t>
-            </a:r>
-            <a:pPr algn="l" indent="0" marL="0">
-              <a:buNone/>
-            </a:pPr>
-            <a:r>
-              <a:rPr lang="en-US" sz="1300" dirty="0">
-                <a:solidFill>
-                  <a:srgbClr val="8B94A3"/>
-                </a:solidFill>
-                <a:latin typeface="Noto Sans SC" pitchFamily="34" charset="0"/>
-                <a:ea typeface="Noto Sans SC" pitchFamily="34" charset="-122"/>
-                <a:cs typeface="Noto Sans SC" pitchFamily="34" charset="-120"/>
-              </a:rPr>
               <a:t> qǐ, "get up"</a:t>
             </a:r>
-            <a:pPr algn="l" indent="0" marL="0">
-              <a:buNone/>
-            </a:pPr>
             <a:r>
               <a:rPr lang="en-US" sz="1300" b="1" dirty="0">
                 <a:solidFill>
@@ -15720,9 +15555,6 @@
               </a:rPr>
               <a:t>Which radical means </a:t>
             </a:r>
-            <a:pPr algn="l" indent="0" marL="0">
-              <a:buNone/>
-            </a:pPr>
             <a:r>
               <a:rPr lang="en-US" sz="1500" b="1" dirty="0">
                 <a:solidFill>
@@ -15734,9 +15566,6 @@
               </a:rPr>
               <a:t>"grass"</a:t>
             </a:r>
-            <a:pPr algn="l" indent="0" marL="0">
-              <a:buNone/>
-            </a:pPr>
             <a:r>
               <a:rPr lang="en-US" sz="1500" dirty="0">
                 <a:solidFill>
@@ -15900,9 +15729,6 @@
               </a:rPr>
               <a:t>Teacher shows </a:t>
             </a:r>
-            <a:pPr algn="l" indent="0" marL="0">
-              <a:buNone/>
-            </a:pPr>
             <a:r>
               <a:rPr lang="en-US" sz="1500" b="1" dirty="0">
                 <a:solidFill>
@@ -15914,9 +15740,6 @@
               </a:rPr>
               <a:t>颜</a:t>
             </a:r>
-            <a:pPr algn="l" indent="0" marL="0">
-              <a:buNone/>
-            </a:pPr>
             <a:r>
               <a:rPr lang="en-US" sz="1500" dirty="0">
                 <a:solidFill>
@@ -16080,9 +15903,6 @@
               </a:rPr>
               <a:t>起</a:t>
             </a:r>
-            <a:pPr algn="l" indent="0" marL="0">
-              <a:buNone/>
-            </a:pPr>
             <a:r>
               <a:rPr lang="en-US" sz="1500" dirty="0">
                 <a:solidFill>
@@ -16645,9 +16465,6 @@
               </a:rPr>
               <a:t>Which radical means </a:t>
             </a:r>
-            <a:pPr algn="l" indent="0" marL="0">
-              <a:buNone/>
-            </a:pPr>
             <a:r>
               <a:rPr lang="en-US" sz="1500" b="1" dirty="0">
                 <a:solidFill>
@@ -16659,9 +16476,6 @@
               </a:rPr>
               <a:t>"grass"</a:t>
             </a:r>
-            <a:pPr algn="l" indent="0" marL="0">
-              <a:buNone/>
-            </a:pPr>
             <a:r>
               <a:rPr lang="en-US" sz="1500" dirty="0">
                 <a:solidFill>
@@ -16826,9 +16640,6 @@
               </a:rPr>
               <a:t>Teacher shows </a:t>
             </a:r>
-            <a:pPr algn="l" indent="0" marL="0">
-              <a:buNone/>
-            </a:pPr>
             <a:r>
               <a:rPr lang="en-US" sz="1500" b="1" dirty="0">
                 <a:solidFill>
@@ -16840,9 +16651,6 @@
               </a:rPr>
               <a:t>颜</a:t>
             </a:r>
-            <a:pPr algn="l" indent="0" marL="0">
-              <a:buNone/>
-            </a:pPr>
             <a:r>
               <a:rPr lang="en-US" sz="1500" dirty="0">
                 <a:solidFill>
@@ -17007,9 +16815,6 @@
               </a:rPr>
               <a:t>起</a:t>
             </a:r>
-            <a:pPr algn="l" indent="0" marL="0">
-              <a:buNone/>
-            </a:pPr>
             <a:r>
               <a:rPr lang="en-US" sz="1500" dirty="0">
                 <a:solidFill>
@@ -17585,9 +17390,6 @@
               </a:rPr>
               <a:t>晚 </a:t>
             </a:r>
-            <a:pPr algn="ctr" indent="0" marL="0">
-              <a:buNone/>
-            </a:pPr>
             <a:r>
               <a:rPr lang="en-US" sz="900" dirty="0">
                 <a:solidFill>
@@ -17831,9 +17633,6 @@
               </a:rPr>
               <a:t>很 </a:t>
             </a:r>
-            <a:pPr algn="ctr" indent="0" marL="0">
-              <a:buNone/>
-            </a:pPr>
             <a:r>
               <a:rPr lang="en-US" sz="900" dirty="0">
                 <a:solidFill>
@@ -18077,9 +17876,6 @@
               </a:rPr>
               <a:t>今 </a:t>
             </a:r>
-            <a:pPr algn="ctr" indent="0" marL="0">
-              <a:buNone/>
-            </a:pPr>
             <a:r>
               <a:rPr lang="en-US" sz="900" dirty="0">
                 <a:solidFill>
@@ -18323,9 +18119,6 @@
               </a:rPr>
               <a:t>春 </a:t>
             </a:r>
-            <a:pPr algn="ctr" indent="0" marL="0">
-              <a:buNone/>
-            </a:pPr>
             <a:r>
               <a:rPr lang="en-US" sz="900" dirty="0">
                 <a:solidFill>
@@ -18569,9 +18362,6 @@
               </a:rPr>
               <a:t>裙 </a:t>
             </a:r>
-            <a:pPr algn="ctr" indent="0" marL="0">
-              <a:buNone/>
-            </a:pPr>
             <a:r>
               <a:rPr lang="en-US" sz="900" dirty="0">
                 <a:solidFill>
@@ -21999,10 +21789,101 @@
               </a:rPr>
               <a:t>穴</a:t>
             </a:r>
+            <a:r>
+              <a:rPr lang="en-US" sz="1000" dirty="0">
+                <a:solidFill>
+                  <a:srgbClr val="1E2A38"/>
+                </a:solidFill>
+                <a:latin typeface="Noto Sans SC" pitchFamily="34" charset="0"/>
+                <a:ea typeface="Noto Sans SC" pitchFamily="34" charset="-122"/>
+                <a:cs typeface="Noto Sans SC" pitchFamily="34" charset="-120"/>
+              </a:rPr>
+              <a:t> cave · </a:t>
+            </a:r>
+            <a:r>
+              <a:rPr lang="en-US" sz="1000" b="1" dirty="0">
+                <a:solidFill>
+                  <a:srgbClr val="1E2A38"/>
+                </a:solidFill>
+                <a:latin typeface="Noto Sans SC" pitchFamily="34" charset="0"/>
+                <a:ea typeface="Noto Sans SC" pitchFamily="34" charset="-122"/>
+                <a:cs typeface="Noto Sans SC" pitchFamily="34" charset="-120"/>
+              </a:rPr>
+              <a:t>矢</a:t>
+            </a:r>
+            <a:r>
+              <a:rPr lang="en-US" sz="1000" dirty="0">
+                <a:solidFill>
+                  <a:srgbClr val="1E2A38"/>
+                </a:solidFill>
+                <a:latin typeface="Noto Sans SC" pitchFamily="34" charset="0"/>
+                <a:ea typeface="Noto Sans SC" pitchFamily="34" charset="-122"/>
+                <a:cs typeface="Noto Sans SC" pitchFamily="34" charset="-120"/>
+              </a:rPr>
+              <a:t> arrow · </a:t>
+            </a:r>
+            <a:r>
+              <a:rPr lang="en-US" sz="1000" b="1" dirty="0">
+                <a:solidFill>
+                  <a:srgbClr val="1E2A38"/>
+                </a:solidFill>
+                <a:latin typeface="Noto Sans SC" pitchFamily="34" charset="0"/>
+                <a:ea typeface="Noto Sans SC" pitchFamily="34" charset="-122"/>
+                <a:cs typeface="Noto Sans SC" pitchFamily="34" charset="-120"/>
+              </a:rPr>
+              <a:t>页</a:t>
+            </a:r>
+            <a:r>
+              <a:rPr lang="en-US" sz="1000" dirty="0">
+                <a:solidFill>
+                  <a:srgbClr val="1E2A38"/>
+                </a:solidFill>
+                <a:latin typeface="Noto Sans SC" pitchFamily="34" charset="0"/>
+                <a:ea typeface="Noto Sans SC" pitchFamily="34" charset="-122"/>
+                <a:cs typeface="Noto Sans SC" pitchFamily="34" charset="-120"/>
+              </a:rPr>
+              <a:t> page · </a:t>
+            </a:r>
+            <a:r>
+              <a:rPr lang="en-US" sz="1000" b="1" dirty="0">
+                <a:solidFill>
+                  <a:srgbClr val="1E2A38"/>
+                </a:solidFill>
+                <a:latin typeface="Noto Sans SC" pitchFamily="34" charset="0"/>
+                <a:ea typeface="Noto Sans SC" pitchFamily="34" charset="-122"/>
+                <a:cs typeface="Noto Sans SC" pitchFamily="34" charset="-120"/>
+              </a:rPr>
+              <a:t>扌</a:t>
+            </a:r>
+            <a:r>
+              <a:rPr lang="en-US" sz="1000" dirty="0">
+                <a:solidFill>
+                  <a:srgbClr val="1E2A38"/>
+                </a:solidFill>
+                <a:latin typeface="Noto Sans SC" pitchFamily="34" charset="0"/>
+                <a:ea typeface="Noto Sans SC" pitchFamily="34" charset="-122"/>
+                <a:cs typeface="Noto Sans SC" pitchFamily="34" charset="-120"/>
+              </a:rPr>
+              <a:t> hand</a:t>
+            </a:r>
+            <a:endParaRPr lang="en-US" sz="1000" dirty="0"/>
+          </a:p>
+          <a:p>
             <a:pPr algn="l" indent="0" marL="0">
               <a:buNone/>
             </a:pPr>
             <a:r>
+              <a:rPr lang="en-US" sz="1000" b="1" dirty="0">
+                <a:solidFill>
+                  <a:srgbClr val="1E2A38"/>
+                </a:solidFill>
+                <a:latin typeface="Noto Sans SC" pitchFamily="34" charset="0"/>
+                <a:ea typeface="Noto Sans SC" pitchFamily="34" charset="-122"/>
+                <a:cs typeface="Noto Sans SC" pitchFamily="34" charset="-120"/>
+              </a:rPr>
+              <a:t>艹</a:t>
+            </a:r>
+            <a:r>
               <a:rPr lang="en-US" sz="1000" dirty="0">
                 <a:solidFill>
                   <a:srgbClr val="1E2A38"/>
@@ -22011,8 +21892,77 @@
                 <a:ea typeface="Noto Sans SC" pitchFamily="34" charset="-122"/>
                 <a:cs typeface="Noto Sans SC" pitchFamily="34" charset="-120"/>
               </a:rPr>
-              <a:t> cave · </a:t>
-            </a:r>
+              <a:t> grass · </a:t>
+            </a:r>
+            <a:r>
+              <a:rPr lang="en-US" sz="1000" b="1" dirty="0">
+                <a:solidFill>
+                  <a:srgbClr val="1E2A38"/>
+                </a:solidFill>
+                <a:latin typeface="Noto Sans SC" pitchFamily="34" charset="0"/>
+                <a:ea typeface="Noto Sans SC" pitchFamily="34" charset="-122"/>
+                <a:cs typeface="Noto Sans SC" pitchFamily="34" charset="-120"/>
+              </a:rPr>
+              <a:t>走</a:t>
+            </a:r>
+            <a:r>
+              <a:rPr lang="en-US" sz="1000" dirty="0">
+                <a:solidFill>
+                  <a:srgbClr val="1E2A38"/>
+                </a:solidFill>
+                <a:latin typeface="Noto Sans SC" pitchFamily="34" charset="0"/>
+                <a:ea typeface="Noto Sans SC" pitchFamily="34" charset="-122"/>
+                <a:cs typeface="Noto Sans SC" pitchFamily="34" charset="-120"/>
+              </a:rPr>
+              <a:t> walk · </a:t>
+            </a:r>
+            <a:r>
+              <a:rPr lang="en-US" sz="1000" b="1" dirty="0">
+                <a:solidFill>
+                  <a:srgbClr val="1E2A38"/>
+                </a:solidFill>
+                <a:latin typeface="Noto Sans SC" pitchFamily="34" charset="0"/>
+                <a:ea typeface="Noto Sans SC" pitchFamily="34" charset="-122"/>
+                <a:cs typeface="Noto Sans SC" pitchFamily="34" charset="-120"/>
+              </a:rPr>
+              <a:t>穿</a:t>
+            </a:r>
+            <a:r>
+              <a:rPr lang="en-US" sz="1000" dirty="0">
+                <a:solidFill>
+                  <a:srgbClr val="1E2A38"/>
+                </a:solidFill>
+                <a:latin typeface="Noto Sans SC" pitchFamily="34" charset="0"/>
+                <a:ea typeface="Noto Sans SC" pitchFamily="34" charset="-122"/>
+                <a:cs typeface="Noto Sans SC" pitchFamily="34" charset="-120"/>
+              </a:rPr>
+              <a:t> chuān · </a:t>
+            </a:r>
+            <a:r>
+              <a:rPr lang="en-US" sz="1000" b="1" dirty="0">
+                <a:solidFill>
+                  <a:srgbClr val="1E2A38"/>
+                </a:solidFill>
+                <a:latin typeface="Noto Sans SC" pitchFamily="34" charset="0"/>
+                <a:ea typeface="Noto Sans SC" pitchFamily="34" charset="-122"/>
+                <a:cs typeface="Noto Sans SC" pitchFamily="34" charset="-120"/>
+              </a:rPr>
+              <a:t>短</a:t>
+            </a:r>
+            <a:r>
+              <a:rPr lang="en-US" sz="1000" dirty="0">
+                <a:solidFill>
+                  <a:srgbClr val="1E2A38"/>
+                </a:solidFill>
+                <a:latin typeface="Noto Sans SC" pitchFamily="34" charset="0"/>
+                <a:ea typeface="Noto Sans SC" pitchFamily="34" charset="-122"/>
+                <a:cs typeface="Noto Sans SC" pitchFamily="34" charset="-120"/>
+              </a:rPr>
+              <a:t> duǎn</a:t>
+            </a:r>
+            <a:endParaRPr lang="en-US" sz="1000" dirty="0"/>
+          </a:p>
+          <a:p>
             <a:pPr algn="l" indent="0" marL="0">
               <a:buNone/>
             </a:pPr>
@@ -22025,11 +21975,8 @@
                 <a:ea typeface="Noto Sans SC" pitchFamily="34" charset="-122"/>
                 <a:cs typeface="Noto Sans SC" pitchFamily="34" charset="-120"/>
               </a:rPr>
-              <a:t>矢</a:t>
-            </a:r>
-            <a:pPr algn="l" indent="0" marL="0">
-              <a:buNone/>
-            </a:pPr>
+              <a:t>颜</a:t>
+            </a:r>
             <a:r>
               <a:rPr lang="en-US" sz="1000" dirty="0">
                 <a:solidFill>
@@ -22039,11 +21986,8 @@
                 <a:ea typeface="Noto Sans SC" pitchFamily="34" charset="-122"/>
                 <a:cs typeface="Noto Sans SC" pitchFamily="34" charset="-120"/>
               </a:rPr>
-              <a:t> arrow · </a:t>
-            </a:r>
-            <a:pPr algn="l" indent="0" marL="0">
-              <a:buNone/>
-            </a:pPr>
+              <a:t> yán · </a:t>
+            </a:r>
             <a:r>
               <a:rPr lang="en-US" sz="1000" b="1" dirty="0">
                 <a:solidFill>
@@ -22053,11 +21997,8 @@
                 <a:ea typeface="Noto Sans SC" pitchFamily="34" charset="-122"/>
                 <a:cs typeface="Noto Sans SC" pitchFamily="34" charset="-120"/>
               </a:rPr>
-              <a:t>页</a:t>
-            </a:r>
-            <a:pPr algn="l" indent="0" marL="0">
-              <a:buNone/>
-            </a:pPr>
+              <a:t>拉</a:t>
+            </a:r>
             <a:r>
               <a:rPr lang="en-US" sz="1000" dirty="0">
                 <a:solidFill>
@@ -22067,11 +22008,8 @@
                 <a:ea typeface="Noto Sans SC" pitchFamily="34" charset="-122"/>
                 <a:cs typeface="Noto Sans SC" pitchFamily="34" charset="-120"/>
               </a:rPr>
-              <a:t> page · </a:t>
-            </a:r>
-            <a:pPr algn="l" indent="0" marL="0">
-              <a:buNone/>
-            </a:pPr>
+              <a:t> lā · </a:t>
+            </a:r>
             <a:r>
               <a:rPr lang="en-US" sz="1000" b="1" dirty="0">
                 <a:solidFill>
@@ -22081,11 +22019,8 @@
                 <a:ea typeface="Noto Sans SC" pitchFamily="34" charset="-122"/>
                 <a:cs typeface="Noto Sans SC" pitchFamily="34" charset="-120"/>
               </a:rPr>
-              <a:t>扌</a:t>
-            </a:r>
-            <a:pPr algn="l" indent="0" marL="0">
-              <a:buNone/>
-            </a:pPr>
+              <a:t>英</a:t>
+            </a:r>
             <a:r>
               <a:rPr lang="en-US" sz="1000" dirty="0">
                 <a:solidFill>
@@ -22095,14 +22030,8 @@
                 <a:ea typeface="Noto Sans SC" pitchFamily="34" charset="-122"/>
                 <a:cs typeface="Noto Sans SC" pitchFamily="34" charset="-120"/>
               </a:rPr>
-              <a:t> hand</a:t>
-            </a:r>
-            <a:endParaRPr lang="en-US" sz="1000" dirty="0"/>
-          </a:p>
-          <a:p>
-            <a:pPr algn="l" indent="0" marL="0">
-              <a:buNone/>
-            </a:pPr>
+              <a:t> yīng · </a:t>
+            </a:r>
             <a:r>
               <a:rPr lang="en-US" sz="1000" b="1" dirty="0">
                 <a:solidFill>
@@ -22112,210 +22041,8 @@
                 <a:ea typeface="Noto Sans SC" pitchFamily="34" charset="-122"/>
                 <a:cs typeface="Noto Sans SC" pitchFamily="34" charset="-120"/>
               </a:rPr>
-              <a:t>艹</a:t>
-            </a:r>
-            <a:pPr algn="l" indent="0" marL="0">
-              <a:buNone/>
-            </a:pPr>
-            <a:r>
-              <a:rPr lang="en-US" sz="1000" dirty="0">
-                <a:solidFill>
-                  <a:srgbClr val="1E2A38"/>
-                </a:solidFill>
-                <a:latin typeface="Noto Sans SC" pitchFamily="34" charset="0"/>
-                <a:ea typeface="Noto Sans SC" pitchFamily="34" charset="-122"/>
-                <a:cs typeface="Noto Sans SC" pitchFamily="34" charset="-120"/>
-              </a:rPr>
-              <a:t> grass · </a:t>
-            </a:r>
-            <a:pPr algn="l" indent="0" marL="0">
-              <a:buNone/>
-            </a:pPr>
-            <a:r>
-              <a:rPr lang="en-US" sz="1000" b="1" dirty="0">
-                <a:solidFill>
-                  <a:srgbClr val="1E2A38"/>
-                </a:solidFill>
-                <a:latin typeface="Noto Sans SC" pitchFamily="34" charset="0"/>
-                <a:ea typeface="Noto Sans SC" pitchFamily="34" charset="-122"/>
-                <a:cs typeface="Noto Sans SC" pitchFamily="34" charset="-120"/>
-              </a:rPr>
-              <a:t>走</a:t>
-            </a:r>
-            <a:pPr algn="l" indent="0" marL="0">
-              <a:buNone/>
-            </a:pPr>
-            <a:r>
-              <a:rPr lang="en-US" sz="1000" dirty="0">
-                <a:solidFill>
-                  <a:srgbClr val="1E2A38"/>
-                </a:solidFill>
-                <a:latin typeface="Noto Sans SC" pitchFamily="34" charset="0"/>
-                <a:ea typeface="Noto Sans SC" pitchFamily="34" charset="-122"/>
-                <a:cs typeface="Noto Sans SC" pitchFamily="34" charset="-120"/>
-              </a:rPr>
-              <a:t> walk · </a:t>
-            </a:r>
-            <a:pPr algn="l" indent="0" marL="0">
-              <a:buNone/>
-            </a:pPr>
-            <a:r>
-              <a:rPr lang="en-US" sz="1000" b="1" dirty="0">
-                <a:solidFill>
-                  <a:srgbClr val="1E2A38"/>
-                </a:solidFill>
-                <a:latin typeface="Noto Sans SC" pitchFamily="34" charset="0"/>
-                <a:ea typeface="Noto Sans SC" pitchFamily="34" charset="-122"/>
-                <a:cs typeface="Noto Sans SC" pitchFamily="34" charset="-120"/>
-              </a:rPr>
-              <a:t>穿</a:t>
-            </a:r>
-            <a:pPr algn="l" indent="0" marL="0">
-              <a:buNone/>
-            </a:pPr>
-            <a:r>
-              <a:rPr lang="en-US" sz="1000" dirty="0">
-                <a:solidFill>
-                  <a:srgbClr val="1E2A38"/>
-                </a:solidFill>
-                <a:latin typeface="Noto Sans SC" pitchFamily="34" charset="0"/>
-                <a:ea typeface="Noto Sans SC" pitchFamily="34" charset="-122"/>
-                <a:cs typeface="Noto Sans SC" pitchFamily="34" charset="-120"/>
-              </a:rPr>
-              <a:t> chuān · </a:t>
-            </a:r>
-            <a:pPr algn="l" indent="0" marL="0">
-              <a:buNone/>
-            </a:pPr>
-            <a:r>
-              <a:rPr lang="en-US" sz="1000" b="1" dirty="0">
-                <a:solidFill>
-                  <a:srgbClr val="1E2A38"/>
-                </a:solidFill>
-                <a:latin typeface="Noto Sans SC" pitchFamily="34" charset="0"/>
-                <a:ea typeface="Noto Sans SC" pitchFamily="34" charset="-122"/>
-                <a:cs typeface="Noto Sans SC" pitchFamily="34" charset="-120"/>
-              </a:rPr>
-              <a:t>短</a:t>
-            </a:r>
-            <a:pPr algn="l" indent="0" marL="0">
-              <a:buNone/>
-            </a:pPr>
-            <a:r>
-              <a:rPr lang="en-US" sz="1000" dirty="0">
-                <a:solidFill>
-                  <a:srgbClr val="1E2A38"/>
-                </a:solidFill>
-                <a:latin typeface="Noto Sans SC" pitchFamily="34" charset="0"/>
-                <a:ea typeface="Noto Sans SC" pitchFamily="34" charset="-122"/>
-                <a:cs typeface="Noto Sans SC" pitchFamily="34" charset="-120"/>
-              </a:rPr>
-              <a:t> duǎn</a:t>
-            </a:r>
-            <a:endParaRPr lang="en-US" sz="1000" dirty="0"/>
-          </a:p>
-          <a:p>
-            <a:pPr algn="l" indent="0" marL="0">
-              <a:buNone/>
-            </a:pPr>
-            <a:r>
-              <a:rPr lang="en-US" sz="1000" b="1" dirty="0">
-                <a:solidFill>
-                  <a:srgbClr val="1E2A38"/>
-                </a:solidFill>
-                <a:latin typeface="Noto Sans SC" pitchFamily="34" charset="0"/>
-                <a:ea typeface="Noto Sans SC" pitchFamily="34" charset="-122"/>
-                <a:cs typeface="Noto Sans SC" pitchFamily="34" charset="-120"/>
-              </a:rPr>
-              <a:t>颜</a:t>
-            </a:r>
-            <a:pPr algn="l" indent="0" marL="0">
-              <a:buNone/>
-            </a:pPr>
-            <a:r>
-              <a:rPr lang="en-US" sz="1000" dirty="0">
-                <a:solidFill>
-                  <a:srgbClr val="1E2A38"/>
-                </a:solidFill>
-                <a:latin typeface="Noto Sans SC" pitchFamily="34" charset="0"/>
-                <a:ea typeface="Noto Sans SC" pitchFamily="34" charset="-122"/>
-                <a:cs typeface="Noto Sans SC" pitchFamily="34" charset="-120"/>
-              </a:rPr>
-              <a:t> yán · </a:t>
-            </a:r>
-            <a:pPr algn="l" indent="0" marL="0">
-              <a:buNone/>
-            </a:pPr>
-            <a:r>
-              <a:rPr lang="en-US" sz="1000" b="1" dirty="0">
-                <a:solidFill>
-                  <a:srgbClr val="1E2A38"/>
-                </a:solidFill>
-                <a:latin typeface="Noto Sans SC" pitchFamily="34" charset="0"/>
-                <a:ea typeface="Noto Sans SC" pitchFamily="34" charset="-122"/>
-                <a:cs typeface="Noto Sans SC" pitchFamily="34" charset="-120"/>
-              </a:rPr>
-              <a:t>拉</a:t>
-            </a:r>
-            <a:pPr algn="l" indent="0" marL="0">
-              <a:buNone/>
-            </a:pPr>
-            <a:r>
-              <a:rPr lang="en-US" sz="1000" dirty="0">
-                <a:solidFill>
-                  <a:srgbClr val="1E2A38"/>
-                </a:solidFill>
-                <a:latin typeface="Noto Sans SC" pitchFamily="34" charset="0"/>
-                <a:ea typeface="Noto Sans SC" pitchFamily="34" charset="-122"/>
-                <a:cs typeface="Noto Sans SC" pitchFamily="34" charset="-120"/>
-              </a:rPr>
-              <a:t> lā · </a:t>
-            </a:r>
-            <a:pPr algn="l" indent="0" marL="0">
-              <a:buNone/>
-            </a:pPr>
-            <a:r>
-              <a:rPr lang="en-US" sz="1000" b="1" dirty="0">
-                <a:solidFill>
-                  <a:srgbClr val="1E2A38"/>
-                </a:solidFill>
-                <a:latin typeface="Noto Sans SC" pitchFamily="34" charset="0"/>
-                <a:ea typeface="Noto Sans SC" pitchFamily="34" charset="-122"/>
-                <a:cs typeface="Noto Sans SC" pitchFamily="34" charset="-120"/>
-              </a:rPr>
-              <a:t>英</a:t>
-            </a:r>
-            <a:pPr algn="l" indent="0" marL="0">
-              <a:buNone/>
-            </a:pPr>
-            <a:r>
-              <a:rPr lang="en-US" sz="1000" dirty="0">
-                <a:solidFill>
-                  <a:srgbClr val="1E2A38"/>
-                </a:solidFill>
-                <a:latin typeface="Noto Sans SC" pitchFamily="34" charset="0"/>
-                <a:ea typeface="Noto Sans SC" pitchFamily="34" charset="-122"/>
-                <a:cs typeface="Noto Sans SC" pitchFamily="34" charset="-120"/>
-              </a:rPr>
-              <a:t> yīng · </a:t>
-            </a:r>
-            <a:pPr algn="l" indent="0" marL="0">
-              <a:buNone/>
-            </a:pPr>
-            <a:r>
-              <a:rPr lang="en-US" sz="1000" b="1" dirty="0">
-                <a:solidFill>
-                  <a:srgbClr val="1E2A38"/>
-                </a:solidFill>
-                <a:latin typeface="Noto Sans SC" pitchFamily="34" charset="0"/>
-                <a:ea typeface="Noto Sans SC" pitchFamily="34" charset="-122"/>
-                <a:cs typeface="Noto Sans SC" pitchFamily="34" charset="-120"/>
-              </a:rPr>
               <a:t>起</a:t>
             </a:r>
-            <a:pPr algn="l" indent="0" marL="0">
-              <a:buNone/>
-            </a:pPr>
             <a:r>
               <a:rPr lang="en-US" sz="1000" dirty="0">
                 <a:solidFill>
@@ -22369,6 +22096,53 @@
               </a:rPr>
               <a:t>1</a:t>
             </a:r>
+            <a:r>
+              <a:rPr lang="en-US" sz="900" dirty="0">
+                <a:solidFill>
+                  <a:srgbClr val="8B94A3"/>
+                </a:solidFill>
+                <a:latin typeface="Noto Sans SC" pitchFamily="34" charset="0"/>
+                <a:ea typeface="Noto Sans SC" pitchFamily="34" charset="-122"/>
+                <a:cs typeface="Noto Sans SC" pitchFamily="34" charset="-120"/>
+              </a:rPr>
+              <a:t> Draw a 3×3 grid. Centre = </a:t>
+            </a:r>
+            <a:r>
+              <a:rPr lang="en-US" sz="900" b="1" dirty="0">
+                <a:solidFill>
+                  <a:srgbClr val="C8943E"/>
+                </a:solidFill>
+                <a:latin typeface="Noto Sans SC" pitchFamily="34" charset="0"/>
+                <a:ea typeface="Noto Sans SC" pitchFamily="34" charset="-122"/>
+                <a:cs typeface="Noto Sans SC" pitchFamily="34" charset="-120"/>
+              </a:rPr>
+              <a:t>部首 FREE</a:t>
+            </a:r>
+            <a:endParaRPr lang="en-US" sz="900" dirty="0"/>
+          </a:p>
+        </p:txBody>
+      </p:sp>
+      <p:sp>
+        <p:nvSpPr>
+          <p:cNvPr id="31" name="Text 29"/>
+          <p:cNvSpPr/>
+          <p:nvPr/>
+        </p:nvSpPr>
+        <p:spPr>
+          <a:xfrm>
+            <a:off x="3479602" y="2618780"/>
+            <a:ext cx="8446261" cy="171450"/>
+          </a:xfrm>
+          <a:prstGeom prst="rect">
+            <a:avLst/>
+          </a:prstGeom>
+          <a:noFill/>
+          <a:ln/>
+        </p:spPr>
+        <p:txBody>
+          <a:bodyPr wrap="square" lIns="0" tIns="0" rIns="0" bIns="0" rtlCol="0" anchor="t"/>
+          <a:lstStyle/>
+          <a:p>
             <a:pPr algn="l" indent="0" marL="0">
               <a:lnSpc>
                 <a:spcPts val="1350"/>
@@ -22376,6 +22150,17 @@
               <a:buNone/>
             </a:pPr>
             <a:r>
+              <a:rPr lang="en-US" sz="900" b="1" dirty="0">
+                <a:solidFill>
+                  <a:srgbClr val="3A7D8C"/>
+                </a:solidFill>
+                <a:latin typeface="Noto Sans SC" pitchFamily="34" charset="0"/>
+                <a:ea typeface="Noto Sans SC" pitchFamily="34" charset="-122"/>
+                <a:cs typeface="Noto Sans SC" pitchFamily="34" charset="-120"/>
+              </a:rPr>
+              <a:t>2</a:t>
+            </a:r>
+            <a:r>
               <a:rPr lang="en-US" sz="900" dirty="0">
                 <a:solidFill>
                   <a:srgbClr val="8B94A3"/>
@@ -22384,8 +22169,33 @@
                 <a:ea typeface="Noto Sans SC" pitchFamily="34" charset="-122"/>
                 <a:cs typeface="Noto Sans SC" pitchFamily="34" charset="-120"/>
               </a:rPr>
-              <a:t> Draw a 3×3 grid. Centre = </a:t>
-            </a:r>
+              <a:t> Pick 8 items from the word bank, arrange randomly</a:t>
+            </a:r>
+            <a:endParaRPr lang="en-US" sz="900" dirty="0"/>
+          </a:p>
+        </p:txBody>
+      </p:sp>
+      <p:sp>
+        <p:nvSpPr>
+          <p:cNvPr id="32" name="Text 30"/>
+          <p:cNvSpPr/>
+          <p:nvPr/>
+        </p:nvSpPr>
+        <p:spPr>
+          <a:xfrm>
+            <a:off x="3479602" y="2790230"/>
+            <a:ext cx="8446261" cy="171450"/>
+          </a:xfrm>
+          <a:prstGeom prst="rect">
+            <a:avLst/>
+          </a:prstGeom>
+          <a:noFill/>
+          <a:ln/>
+        </p:spPr>
+        <p:txBody>
+          <a:bodyPr wrap="square" lIns="0" tIns="0" rIns="0" bIns="0" rtlCol="0" anchor="t"/>
+          <a:lstStyle/>
+          <a:p>
             <a:pPr algn="l" indent="0" marL="0">
               <a:lnSpc>
                 <a:spcPts val="1350"/>
@@ -22395,13 +22205,24 @@
             <a:r>
               <a:rPr lang="en-US" sz="900" b="1" dirty="0">
                 <a:solidFill>
-                  <a:srgbClr val="C8943E"/>
-                </a:solidFill>
-                <a:latin typeface="Noto Sans SC" pitchFamily="34" charset="0"/>
-                <a:ea typeface="Noto Sans SC" pitchFamily="34" charset="-122"/>
-                <a:cs typeface="Noto Sans SC" pitchFamily="34" charset="-120"/>
-              </a:rPr>
-              <a:t>部首 FREE</a:t>
+                  <a:srgbClr val="3A7D8C"/>
+                </a:solidFill>
+                <a:latin typeface="Noto Sans SC" pitchFamily="34" charset="0"/>
+                <a:ea typeface="Noto Sans SC" pitchFamily="34" charset="-122"/>
+                <a:cs typeface="Noto Sans SC" pitchFamily="34" charset="-120"/>
+              </a:rPr>
+              <a:t>3</a:t>
+            </a:r>
+            <a:r>
+              <a:rPr lang="en-US" sz="900" dirty="0">
+                <a:solidFill>
+                  <a:srgbClr val="8B94A3"/>
+                </a:solidFill>
+                <a:latin typeface="Noto Sans SC" pitchFamily="34" charset="0"/>
+                <a:ea typeface="Noto Sans SC" pitchFamily="34" charset="-122"/>
+                <a:cs typeface="Noto Sans SC" pitchFamily="34" charset="-120"/>
+              </a:rPr>
+              <a:t> Teacher calls a meaning or reads an example character — cross it off!</a:t>
             </a:r>
             <a:endParaRPr lang="en-US" sz="900" dirty="0"/>
           </a:p>
@@ -22409,13 +22230,13 @@
       </p:sp>
       <p:sp>
         <p:nvSpPr>
-          <p:cNvPr id="31" name="Text 29"/>
-          <p:cNvSpPr/>
-          <p:nvPr/>
-        </p:nvSpPr>
-        <p:spPr>
-          <a:xfrm>
-            <a:off x="3479602" y="2618780"/>
+          <p:cNvPr id="33" name="Text 31"/>
+          <p:cNvSpPr/>
+          <p:nvPr/>
+        </p:nvSpPr>
+        <p:spPr>
+          <a:xfrm>
+            <a:off x="3479602" y="2961680"/>
             <a:ext cx="8446261" cy="171450"/>
           </a:xfrm>
           <a:prstGeom prst="rect">
@@ -22443,14 +22264,8 @@
                 <a:ea typeface="Noto Sans SC" pitchFamily="34" charset="-122"/>
                 <a:cs typeface="Noto Sans SC" pitchFamily="34" charset="-120"/>
               </a:rPr>
-              <a:t>2</a:t>
-            </a:r>
-            <a:pPr algn="l" indent="0" marL="0">
-              <a:lnSpc>
-                <a:spcPts val="1350"/>
-              </a:lnSpc>
-              <a:buNone/>
-            </a:pPr>
+              <a:t>4</a:t>
+            </a:r>
             <a:r>
               <a:rPr lang="en-US" sz="900" dirty="0">
                 <a:solidFill>
@@ -22460,149 +22275,19 @@
                 <a:ea typeface="Noto Sans SC" pitchFamily="34" charset="-122"/>
                 <a:cs typeface="Noto Sans SC" pitchFamily="34" charset="-120"/>
               </a:rPr>
-              <a:t> Pick 8 items from the word bank, arrange randomly</a:t>
-            </a:r>
-            <a:endParaRPr lang="en-US" sz="900" dirty="0"/>
-          </a:p>
-        </p:txBody>
-      </p:sp>
-      <p:sp>
-        <p:nvSpPr>
-          <p:cNvPr id="32" name="Text 30"/>
-          <p:cNvSpPr/>
-          <p:nvPr/>
-        </p:nvSpPr>
-        <p:spPr>
-          <a:xfrm>
-            <a:off x="3479602" y="2790230"/>
-            <a:ext cx="8446261" cy="171450"/>
-          </a:xfrm>
-          <a:prstGeom prst="rect">
-            <a:avLst/>
-          </a:prstGeom>
-          <a:noFill/>
-          <a:ln/>
-        </p:spPr>
-        <p:txBody>
-          <a:bodyPr wrap="square" lIns="0" tIns="0" rIns="0" bIns="0" rtlCol="0" anchor="t"/>
-          <a:lstStyle/>
-          <a:p>
-            <a:pPr algn="l" indent="0" marL="0">
-              <a:lnSpc>
-                <a:spcPts val="1350"/>
-              </a:lnSpc>
-              <a:buNone/>
-            </a:pPr>
+              <a:t> Shout </a:t>
+            </a:r>
             <a:r>
               <a:rPr lang="en-US" sz="900" b="1" dirty="0">
                 <a:solidFill>
-                  <a:srgbClr val="3A7D8C"/>
-                </a:solidFill>
-                <a:latin typeface="Noto Sans SC" pitchFamily="34" charset="0"/>
-                <a:ea typeface="Noto Sans SC" pitchFamily="34" charset="-122"/>
-                <a:cs typeface="Noto Sans SC" pitchFamily="34" charset="-120"/>
-              </a:rPr>
-              <a:t>3</a:t>
-            </a:r>
-            <a:pPr algn="l" indent="0" marL="0">
-              <a:lnSpc>
-                <a:spcPts val="1350"/>
-              </a:lnSpc>
-              <a:buNone/>
-            </a:pPr>
-            <a:r>
-              <a:rPr lang="en-US" sz="900" dirty="0">
-                <a:solidFill>
                   <a:srgbClr val="8B94A3"/>
                 </a:solidFill>
                 <a:latin typeface="Noto Sans SC" pitchFamily="34" charset="0"/>
                 <a:ea typeface="Noto Sans SC" pitchFamily="34" charset="-122"/>
                 <a:cs typeface="Noto Sans SC" pitchFamily="34" charset="-120"/>
               </a:rPr>
-              <a:t> Teacher calls a meaning or reads an example character — cross it off!</a:t>
-            </a:r>
-            <a:endParaRPr lang="en-US" sz="900" dirty="0"/>
-          </a:p>
-        </p:txBody>
-      </p:sp>
-      <p:sp>
-        <p:nvSpPr>
-          <p:cNvPr id="33" name="Text 31"/>
-          <p:cNvSpPr/>
-          <p:nvPr/>
-        </p:nvSpPr>
-        <p:spPr>
-          <a:xfrm>
-            <a:off x="3479602" y="2961680"/>
-            <a:ext cx="8446261" cy="171450"/>
-          </a:xfrm>
-          <a:prstGeom prst="rect">
-            <a:avLst/>
-          </a:prstGeom>
-          <a:noFill/>
-          <a:ln/>
-        </p:spPr>
-        <p:txBody>
-          <a:bodyPr wrap="square" lIns="0" tIns="0" rIns="0" bIns="0" rtlCol="0" anchor="t"/>
-          <a:lstStyle/>
-          <a:p>
-            <a:pPr algn="l" indent="0" marL="0">
-              <a:lnSpc>
-                <a:spcPts val="1350"/>
-              </a:lnSpc>
-              <a:buNone/>
-            </a:pPr>
-            <a:r>
-              <a:rPr lang="en-US" sz="900" b="1" dirty="0">
-                <a:solidFill>
-                  <a:srgbClr val="3A7D8C"/>
-                </a:solidFill>
-                <a:latin typeface="Noto Sans SC" pitchFamily="34" charset="0"/>
-                <a:ea typeface="Noto Sans SC" pitchFamily="34" charset="-122"/>
-                <a:cs typeface="Noto Sans SC" pitchFamily="34" charset="-120"/>
-              </a:rPr>
-              <a:t>4</a:t>
-            </a:r>
-            <a:pPr algn="l" indent="0" marL="0">
-              <a:lnSpc>
-                <a:spcPts val="1350"/>
-              </a:lnSpc>
-              <a:buNone/>
-            </a:pPr>
-            <a:r>
-              <a:rPr lang="en-US" sz="900" dirty="0">
-                <a:solidFill>
-                  <a:srgbClr val="8B94A3"/>
-                </a:solidFill>
-                <a:latin typeface="Noto Sans SC" pitchFamily="34" charset="0"/>
-                <a:ea typeface="Noto Sans SC" pitchFamily="34" charset="-122"/>
-                <a:cs typeface="Noto Sans SC" pitchFamily="34" charset="-120"/>
-              </a:rPr>
-              <a:t> Shout </a:t>
-            </a:r>
-            <a:pPr algn="l" indent="0" marL="0">
-              <a:lnSpc>
-                <a:spcPts val="1350"/>
-              </a:lnSpc>
-              <a:buNone/>
-            </a:pPr>
-            <a:r>
-              <a:rPr lang="en-US" sz="900" b="1" dirty="0">
-                <a:solidFill>
-                  <a:srgbClr val="8B94A3"/>
-                </a:solidFill>
-                <a:latin typeface="Noto Sans SC" pitchFamily="34" charset="0"/>
-                <a:ea typeface="Noto Sans SC" pitchFamily="34" charset="-122"/>
-                <a:cs typeface="Noto Sans SC" pitchFamily="34" charset="-120"/>
-              </a:rPr>
               <a:t>BINGO!</a:t>
             </a:r>
-            <a:pPr algn="l" indent="0" marL="0">
-              <a:lnSpc>
-                <a:spcPts val="1350"/>
-              </a:lnSpc>
-              <a:buNone/>
-            </a:pPr>
             <a:r>
               <a:rPr lang="en-US" sz="900" dirty="0">
                 <a:solidFill>
